--- a/it/slides/21-Architettura_dei_Calcolatori-Ingresso_Uscita-Lab.pptx
+++ b/it/slides/21-Architettura_dei_Calcolatori-Ingresso_Uscita-Lab.pptx
@@ -118,25 +118,25 @@
   <p:extLst>
     <p:ext uri="{521415D9-36F7-43E2-AB2F-B90AF26B5E84}">
       <p14:sectionLst xmlns:p14="http://schemas.microsoft.com/office/powerpoint/2010/main">
-        <p14:section name="Apertura" id="{3de67fdb-ed73-37bc-2857-2b61dad26fd9}">
+        <p14:section name="Apertura" id="{ef8f3fcd-bf92-f7ba-fd6b-c0cd60dd5af3}">
           <p14:sldIdLst>
             <p14:sldId id="256"/>
             <p14:sldId id="257"/>
           </p14:sldIdLst>
         </p14:section>
-        <p14:section name="Riscaldamento sulla macchina" id="{1aa6bb5f-6b35-7e6b-9f4e-d895a4d1c451}">
+        <p14:section name="Riscaldamento sulla macchina" id="{f955ef15-91bf-02b4-7941-e3f0f9d5d76c}">
           <p14:sldIdLst>
             <p14:sldId id="258"/>
           </p14:sldIdLst>
         </p14:section>
-        <p14:section name="Il programma completo" id="{66a0d2c6-564f-251a-ad4c-6e7b958177bc}">
+        <p14:section name="Il programma completo" id="{fbbb3bd8-b8e9-2293-aae5-ead13fa3a5f6}">
           <p14:sldIdLst>
             <p14:sldId id="259"/>
             <p14:sldId id="260"/>
             <p14:sldId id="261"/>
           </p14:sldIdLst>
         </p14:section>
-        <p14:section name="Eseguire e provare" id="{b8837bc8-fe31-6d32-7f3e-7e9225ebc47a}">
+        <p14:section name="Eseguire e provare" id="{cd75067c-791f-33f5-de10-cc9a963de67d}">
           <p14:sldIdLst>
             <p14:sldId id="262"/>
             <p14:sldId id="263"/>
@@ -145,7 +145,7 @@
             <p14:sldId id="266"/>
           </p14:sldIdLst>
         </p14:section>
-        <p14:section name="Esercizi" id="{93ca5cee-6f7a-d753-19a0-5de6c177f975}">
+        <p14:section name="Esercizi" id="{ded56f8f-a427-4f42-f7b5-7590b1c440fe}">
           <p14:sldIdLst>
             <p14:sldId id="267"/>
           </p14:sldIdLst>

--- a/it/slides/21-Architettura_dei_Calcolatori-Ingresso_Uscita-Lab.pptx
+++ b/it/slides/21-Architettura_dei_Calcolatori-Ingresso_Uscita-Lab.pptx
@@ -118,25 +118,25 @@
   <p:extLst>
     <p:ext uri="{521415D9-36F7-43E2-AB2F-B90AF26B5E84}">
       <p14:sectionLst xmlns:p14="http://schemas.microsoft.com/office/powerpoint/2010/main">
-        <p14:section name="Apertura" id="{ef8f3fcd-bf92-f7ba-fd6b-c0cd60dd5af3}">
+        <p14:section name="Apertura" id="{95c8ad39-f32e-4a1e-6fba-ff0ca530d789}">
           <p14:sldIdLst>
             <p14:sldId id="256"/>
             <p14:sldId id="257"/>
           </p14:sldIdLst>
         </p14:section>
-        <p14:section name="Riscaldamento sulla macchina" id="{f955ef15-91bf-02b4-7941-e3f0f9d5d76c}">
+        <p14:section name="Riscaldamento sulla macchina" id="{4976de3f-df89-aa6b-0401-bb0592d928a2}">
           <p14:sldIdLst>
             <p14:sldId id="258"/>
           </p14:sldIdLst>
         </p14:section>
-        <p14:section name="Il programma completo" id="{fbbb3bd8-b8e9-2293-aae5-ead13fa3a5f6}">
+        <p14:section name="Il programma completo" id="{289696c7-a077-789f-5b90-03e02299b02d}">
           <p14:sldIdLst>
             <p14:sldId id="259"/>
             <p14:sldId id="260"/>
             <p14:sldId id="261"/>
           </p14:sldIdLst>
         </p14:section>
-        <p14:section name="Eseguire e provare" id="{cd75067c-791f-33f5-de10-cc9a963de67d}">
+        <p14:section name="Eseguire e provare" id="{6670b2ad-61c5-f1fd-2fd5-9a2ebbc0e0f5}">
           <p14:sldIdLst>
             <p14:sldId id="262"/>
             <p14:sldId id="263"/>
@@ -145,7 +145,7 @@
             <p14:sldId id="266"/>
           </p14:sldIdLst>
         </p14:section>
-        <p14:section name="Esercizi" id="{ded56f8f-a427-4f42-f7b5-7590b1c440fe}">
+        <p14:section name="Esercizi" id="{567ac4e7-c7f6-e68f-ca22-280efa6475ad}">
           <p14:sldIdLst>
             <p14:sldId id="267"/>
           </p14:sldIdLst>
@@ -556,7 +556,8 @@
               <a:rPr lang="en-US" dirty="0"/>
               <a:t>Questa è la presentazione del codice della Lezione 21. Mentre la presentazione della lezione sviluppa i concetti, questa raccoglie tutto ciò che si scrive e si esegue: ogni listato con il suo commento, il programma completo della lezione, il risultato che deve produrre, e la procedura per provarlo su ciascuno dei tre host. Le due presentazioni vanno lette insieme: i concetti spiegano il codice, e il codice dà ai concetti una conseguenza osservabile.
 Stato di apprendimento: DA COMPRENDERE OGGI, alla fine di questa lezione lo spiegate, lo seguite passo passo e lo applicate da soli; DA UTILIZZARE OGGI, oggi seguite e usate la ricetta; come funziona dentro si spiega più avanti, o non fa parte del corso; DA COMPRENDERE PIÙ AVANTI, riconoscete il nome e lo scopo; lo spiega una lezione successiva. Una slide senza etichetta è contesto: una storia, un esempio, una domanda, un esercizio.
-Stato di apprendimento di questa lezione. DA COMPRENDERE OGGI: polling, interruzioni, DMA; display CRT e LCD; tastiera e mouse; le stampanti. DA UTILIZZARE OGGI: il programma completo, gli strumenti di PRG32 (si usa, non si studia, in questo corso). DA COMPRENDERE PIÙ AVANTI: niente. Una slide senza etichetta è contesto: una storia, un esempio, una domanda, un esercizio.</a:t>
+Stato di apprendimento di questa lezione. DA COMPRENDERE OGGI: polling, interruzioni, DMA; display CRT e LCD; tastiera e mouse; le stampanti. DA UTILIZZARE OGGI: il programma completo, gli strumenti di PRG32 (si usa, non si studia, in questo corso). DA COMPRENDERE PIÙ AVANTI: niente. Una slide senza etichetta è contesto: una storia, un esempio, una domanda, un esercizio.
+Percorso. I risultati di oggi: (1) descrivere come funzionano display, tastiere e stampanti; (2) confrontare il polling con le interruzioni per leggere un dispositivo. Si appoggia su: solo ciò che ha preparato la Lezione 01. Prossimo passo: Lezione 22, Verm1, parte 4: il gioco finito.</a:t>
             </a:r>
             <a:endParaRPr lang="en-US" dirty="0"/>
           </a:p>
